--- a/docs/aegis-ps8.pptx
+++ b/docs/aegis-ps8.pptx
@@ -3232,7 +3232,7 @@
                 </a:solidFill>
                 <a:latin typeface="Inter"/>
               </a:rPr>
-              <a:t>SMART INDIA HACKATHON · PROBLEM STATEMENT 8</a:t>
+              <a:t>BINARY HACKS · PROBLEM STATEMENT 8</a:t>
             </a:r>
           </a:p>
         </p:txBody>
